--- a/public/videos/repositories/darts-event-alert/darts-event-alert-tech-preview.pptx
+++ b/public/videos/repositories/darts-event-alert/darts-event-alert-tech-preview.pptx
@@ -134,7 +134,7 @@
           <p:cNvPr id="2" name="タイトル 1">
             <a:extLst>
               <a:ext uri="{FF2B5EF4-FFF2-40B4-BE49-F238E27FC236}">
-                <a16:creationId xmlns:a16="http://schemas.microsoft.com/office/drawing/2014/main" id="{A74179A8-B3F9-5A00-7AC2-33A3C49DF08D}"/>
+                <a16:creationId xmlns:a16="http://schemas.microsoft.com/office/drawing/2014/main" id="{B9243713-83FE-10FA-F828-986A420436AB}"/>
               </a:ext>
             </a:extLst>
           </p:cNvPr>
@@ -171,7 +171,7 @@
           <p:cNvPr id="3" name="字幕 2">
             <a:extLst>
               <a:ext uri="{FF2B5EF4-FFF2-40B4-BE49-F238E27FC236}">
-                <a16:creationId xmlns:a16="http://schemas.microsoft.com/office/drawing/2014/main" id="{E2D7E41A-DF5D-3F11-9982-EC6EE0942F94}"/>
+                <a16:creationId xmlns:a16="http://schemas.microsoft.com/office/drawing/2014/main" id="{FB98E8B4-5907-A464-34B4-2442C5D4ACDB}"/>
               </a:ext>
             </a:extLst>
           </p:cNvPr>
@@ -241,7 +241,7 @@
           <p:cNvPr id="4" name="日付プレースホルダー 3">
             <a:extLst>
               <a:ext uri="{FF2B5EF4-FFF2-40B4-BE49-F238E27FC236}">
-                <a16:creationId xmlns:a16="http://schemas.microsoft.com/office/drawing/2014/main" id="{8514A14B-DA4C-1672-3876-6A83D09B3375}"/>
+                <a16:creationId xmlns:a16="http://schemas.microsoft.com/office/drawing/2014/main" id="{77A4B4DB-BC9F-81F6-DC90-95AE0F9AE480}"/>
               </a:ext>
             </a:extLst>
           </p:cNvPr>
@@ -257,7 +257,7 @@
           <a:bodyPr/>
           <a:lstStyle/>
           <a:p>
-            <a:fld id="{65ABD7D7-2CB2-4624-B8BF-4AB23DDE74CA}" type="datetimeFigureOut">
+            <a:fld id="{0C46D9D4-C34E-4A15-ABC0-E0E2A34940EA}" type="datetimeFigureOut">
               <a:rPr kumimoji="1" lang="ja-JP" altLang="en-US" smtClean="0"/>
               <a:t>2026/7/30</a:t>
             </a:fld>
@@ -270,7 +270,7 @@
           <p:cNvPr id="5" name="フッター プレースホルダー 4">
             <a:extLst>
               <a:ext uri="{FF2B5EF4-FFF2-40B4-BE49-F238E27FC236}">
-                <a16:creationId xmlns:a16="http://schemas.microsoft.com/office/drawing/2014/main" id="{9080AEAA-914F-3DF1-CA55-D8030E657EEE}"/>
+                <a16:creationId xmlns:a16="http://schemas.microsoft.com/office/drawing/2014/main" id="{3336A5F9-633F-53AA-A782-E98143154760}"/>
               </a:ext>
             </a:extLst>
           </p:cNvPr>
@@ -295,7 +295,7 @@
           <p:cNvPr id="6" name="スライド番号プレースホルダー 5">
             <a:extLst>
               <a:ext uri="{FF2B5EF4-FFF2-40B4-BE49-F238E27FC236}">
-                <a16:creationId xmlns:a16="http://schemas.microsoft.com/office/drawing/2014/main" id="{EC1992BA-19C3-A9C2-F9D3-F99D844BA212}"/>
+                <a16:creationId xmlns:a16="http://schemas.microsoft.com/office/drawing/2014/main" id="{396D7AEF-0B09-6320-3BE3-44FEA8D4788F}"/>
               </a:ext>
             </a:extLst>
           </p:cNvPr>
@@ -311,7 +311,7 @@
           <a:bodyPr/>
           <a:lstStyle/>
           <a:p>
-            <a:fld id="{94A46EC2-24A0-4D7E-8FEF-496A3CB3A35B}" type="slidenum">
+            <a:fld id="{3E531130-47C0-4870-AFFD-43BC7F3D2CAC}" type="slidenum">
               <a:rPr kumimoji="1" lang="ja-JP" altLang="en-US" smtClean="0"/>
               <a:t>‹#›</a:t>
             </a:fld>
@@ -322,7 +322,7 @@
     </p:spTree>
     <p:extLst>
       <p:ext uri="{BB962C8B-B14F-4D97-AF65-F5344CB8AC3E}">
-        <p14:creationId xmlns:p14="http://schemas.microsoft.com/office/powerpoint/2010/main" val="1978768336"/>
+        <p14:creationId xmlns:p14="http://schemas.microsoft.com/office/powerpoint/2010/main" val="4057581845"/>
       </p:ext>
     </p:extLst>
   </p:cSld>
@@ -354,7 +354,7 @@
           <p:cNvPr id="2" name="タイトル 1">
             <a:extLst>
               <a:ext uri="{FF2B5EF4-FFF2-40B4-BE49-F238E27FC236}">
-                <a16:creationId xmlns:a16="http://schemas.microsoft.com/office/drawing/2014/main" id="{E536C614-E876-6348-41D7-AED4E7C09CBD}"/>
+                <a16:creationId xmlns:a16="http://schemas.microsoft.com/office/drawing/2014/main" id="{39E0C7B4-8646-F49C-036A-BFCCEEF48100}"/>
               </a:ext>
             </a:extLst>
           </p:cNvPr>
@@ -382,7 +382,7 @@
           <p:cNvPr id="3" name="縦書きテキスト プレースホルダー 2">
             <a:extLst>
               <a:ext uri="{FF2B5EF4-FFF2-40B4-BE49-F238E27FC236}">
-                <a16:creationId xmlns:a16="http://schemas.microsoft.com/office/drawing/2014/main" id="{E5A8356A-ECE5-6869-5576-EC60139D4BE3}"/>
+                <a16:creationId xmlns:a16="http://schemas.microsoft.com/office/drawing/2014/main" id="{CDA0E87B-E6CA-B0E1-43DB-AC7753F45E14}"/>
               </a:ext>
             </a:extLst>
           </p:cNvPr>
@@ -471,7 +471,7 @@
           <p:cNvPr id="4" name="日付プレースホルダー 3">
             <a:extLst>
               <a:ext uri="{FF2B5EF4-FFF2-40B4-BE49-F238E27FC236}">
-                <a16:creationId xmlns:a16="http://schemas.microsoft.com/office/drawing/2014/main" id="{A861CE4B-4198-4CD6-47A2-9F2ECDBA5B05}"/>
+                <a16:creationId xmlns:a16="http://schemas.microsoft.com/office/drawing/2014/main" id="{470AECFE-ACCD-7457-4A6C-4D935C7CE5CB}"/>
               </a:ext>
             </a:extLst>
           </p:cNvPr>
@@ -487,7 +487,7 @@
           <a:bodyPr/>
           <a:lstStyle/>
           <a:p>
-            <a:fld id="{65ABD7D7-2CB2-4624-B8BF-4AB23DDE74CA}" type="datetimeFigureOut">
+            <a:fld id="{0C46D9D4-C34E-4A15-ABC0-E0E2A34940EA}" type="datetimeFigureOut">
               <a:rPr kumimoji="1" lang="ja-JP" altLang="en-US" smtClean="0"/>
               <a:t>2026/7/30</a:t>
             </a:fld>
@@ -500,7 +500,7 @@
           <p:cNvPr id="5" name="フッター プレースホルダー 4">
             <a:extLst>
               <a:ext uri="{FF2B5EF4-FFF2-40B4-BE49-F238E27FC236}">
-                <a16:creationId xmlns:a16="http://schemas.microsoft.com/office/drawing/2014/main" id="{61FB64A0-7E00-7368-B81B-F9EF06028536}"/>
+                <a16:creationId xmlns:a16="http://schemas.microsoft.com/office/drawing/2014/main" id="{16AB6179-236B-190E-FD32-646D61C33D76}"/>
               </a:ext>
             </a:extLst>
           </p:cNvPr>
@@ -525,7 +525,7 @@
           <p:cNvPr id="6" name="スライド番号プレースホルダー 5">
             <a:extLst>
               <a:ext uri="{FF2B5EF4-FFF2-40B4-BE49-F238E27FC236}">
-                <a16:creationId xmlns:a16="http://schemas.microsoft.com/office/drawing/2014/main" id="{48712080-0406-0455-5864-6E20746B6263}"/>
+                <a16:creationId xmlns:a16="http://schemas.microsoft.com/office/drawing/2014/main" id="{E9340D3F-4FFB-EAEE-977F-4E87F19ABCDA}"/>
               </a:ext>
             </a:extLst>
           </p:cNvPr>
@@ -541,7 +541,7 @@
           <a:bodyPr/>
           <a:lstStyle/>
           <a:p>
-            <a:fld id="{94A46EC2-24A0-4D7E-8FEF-496A3CB3A35B}" type="slidenum">
+            <a:fld id="{3E531130-47C0-4870-AFFD-43BC7F3D2CAC}" type="slidenum">
               <a:rPr kumimoji="1" lang="ja-JP" altLang="en-US" smtClean="0"/>
               <a:t>‹#›</a:t>
             </a:fld>
@@ -552,7 +552,7 @@
     </p:spTree>
     <p:extLst>
       <p:ext uri="{BB962C8B-B14F-4D97-AF65-F5344CB8AC3E}">
-        <p14:creationId xmlns:p14="http://schemas.microsoft.com/office/powerpoint/2010/main" val="3780880060"/>
+        <p14:creationId xmlns:p14="http://schemas.microsoft.com/office/powerpoint/2010/main" val="3895532226"/>
       </p:ext>
     </p:extLst>
   </p:cSld>
@@ -584,7 +584,7 @@
           <p:cNvPr id="2" name="縦書きタイトル 1">
             <a:extLst>
               <a:ext uri="{FF2B5EF4-FFF2-40B4-BE49-F238E27FC236}">
-                <a16:creationId xmlns:a16="http://schemas.microsoft.com/office/drawing/2014/main" id="{2FE53AA1-C002-CA31-C087-E346F6FD4A02}"/>
+                <a16:creationId xmlns:a16="http://schemas.microsoft.com/office/drawing/2014/main" id="{2D5B7093-BFC5-E962-B1B1-53275397FFD5}"/>
               </a:ext>
             </a:extLst>
           </p:cNvPr>
@@ -617,7 +617,7 @@
           <p:cNvPr id="3" name="縦書きテキスト プレースホルダー 2">
             <a:extLst>
               <a:ext uri="{FF2B5EF4-FFF2-40B4-BE49-F238E27FC236}">
-                <a16:creationId xmlns:a16="http://schemas.microsoft.com/office/drawing/2014/main" id="{9E800C59-FA7D-189A-69EB-4FEB7EF71C94}"/>
+                <a16:creationId xmlns:a16="http://schemas.microsoft.com/office/drawing/2014/main" id="{47637D64-8503-E40C-E696-4754F1E76124}"/>
               </a:ext>
             </a:extLst>
           </p:cNvPr>
@@ -711,7 +711,7 @@
           <p:cNvPr id="4" name="日付プレースホルダー 3">
             <a:extLst>
               <a:ext uri="{FF2B5EF4-FFF2-40B4-BE49-F238E27FC236}">
-                <a16:creationId xmlns:a16="http://schemas.microsoft.com/office/drawing/2014/main" id="{EB76556A-2771-F1F6-76C2-CC1670CEF771}"/>
+                <a16:creationId xmlns:a16="http://schemas.microsoft.com/office/drawing/2014/main" id="{C9BCD530-AB77-1A38-A07F-FC255A886611}"/>
               </a:ext>
             </a:extLst>
           </p:cNvPr>
@@ -727,7 +727,7 @@
           <a:bodyPr/>
           <a:lstStyle/>
           <a:p>
-            <a:fld id="{65ABD7D7-2CB2-4624-B8BF-4AB23DDE74CA}" type="datetimeFigureOut">
+            <a:fld id="{0C46D9D4-C34E-4A15-ABC0-E0E2A34940EA}" type="datetimeFigureOut">
               <a:rPr kumimoji="1" lang="ja-JP" altLang="en-US" smtClean="0"/>
               <a:t>2026/7/30</a:t>
             </a:fld>
@@ -740,7 +740,7 @@
           <p:cNvPr id="5" name="フッター プレースホルダー 4">
             <a:extLst>
               <a:ext uri="{FF2B5EF4-FFF2-40B4-BE49-F238E27FC236}">
-                <a16:creationId xmlns:a16="http://schemas.microsoft.com/office/drawing/2014/main" id="{74F881A3-53D5-38DF-1779-8292DF3468A9}"/>
+                <a16:creationId xmlns:a16="http://schemas.microsoft.com/office/drawing/2014/main" id="{4D5F6528-22B0-C9CA-DC4A-0EC11C3BFB30}"/>
               </a:ext>
             </a:extLst>
           </p:cNvPr>
@@ -765,7 +765,7 @@
           <p:cNvPr id="6" name="スライド番号プレースホルダー 5">
             <a:extLst>
               <a:ext uri="{FF2B5EF4-FFF2-40B4-BE49-F238E27FC236}">
-                <a16:creationId xmlns:a16="http://schemas.microsoft.com/office/drawing/2014/main" id="{8FD37E10-2ABE-1CC5-CC6C-DDA9B93FBDB1}"/>
+                <a16:creationId xmlns:a16="http://schemas.microsoft.com/office/drawing/2014/main" id="{356B3FF8-7570-24C7-2756-1C110250A055}"/>
               </a:ext>
             </a:extLst>
           </p:cNvPr>
@@ -781,7 +781,7 @@
           <a:bodyPr/>
           <a:lstStyle/>
           <a:p>
-            <a:fld id="{94A46EC2-24A0-4D7E-8FEF-496A3CB3A35B}" type="slidenum">
+            <a:fld id="{3E531130-47C0-4870-AFFD-43BC7F3D2CAC}" type="slidenum">
               <a:rPr kumimoji="1" lang="ja-JP" altLang="en-US" smtClean="0"/>
               <a:t>‹#›</a:t>
             </a:fld>
@@ -792,7 +792,7 @@
     </p:spTree>
     <p:extLst>
       <p:ext uri="{BB962C8B-B14F-4D97-AF65-F5344CB8AC3E}">
-        <p14:creationId xmlns:p14="http://schemas.microsoft.com/office/powerpoint/2010/main" val="2338477599"/>
+        <p14:creationId xmlns:p14="http://schemas.microsoft.com/office/powerpoint/2010/main" val="2848611536"/>
       </p:ext>
     </p:extLst>
   </p:cSld>
@@ -824,7 +824,7 @@
           <p:cNvPr id="2" name="タイトル 1">
             <a:extLst>
               <a:ext uri="{FF2B5EF4-FFF2-40B4-BE49-F238E27FC236}">
-                <a16:creationId xmlns:a16="http://schemas.microsoft.com/office/drawing/2014/main" id="{B16FB2C1-8791-9B45-211A-899E620A84F7}"/>
+                <a16:creationId xmlns:a16="http://schemas.microsoft.com/office/drawing/2014/main" id="{DC4630C7-EC2A-F40F-2744-83897A15D9E6}"/>
               </a:ext>
             </a:extLst>
           </p:cNvPr>
@@ -852,7 +852,7 @@
           <p:cNvPr id="3" name="コンテンツ プレースホルダー 2">
             <a:extLst>
               <a:ext uri="{FF2B5EF4-FFF2-40B4-BE49-F238E27FC236}">
-                <a16:creationId xmlns:a16="http://schemas.microsoft.com/office/drawing/2014/main" id="{DC6C7740-83FC-BFDF-1804-83EA91CE9500}"/>
+                <a16:creationId xmlns:a16="http://schemas.microsoft.com/office/drawing/2014/main" id="{E3CA31F0-DF60-815D-A5EB-6B10AE965ECC}"/>
               </a:ext>
             </a:extLst>
           </p:cNvPr>
@@ -941,7 +941,7 @@
           <p:cNvPr id="4" name="日付プレースホルダー 3">
             <a:extLst>
               <a:ext uri="{FF2B5EF4-FFF2-40B4-BE49-F238E27FC236}">
-                <a16:creationId xmlns:a16="http://schemas.microsoft.com/office/drawing/2014/main" id="{D4DF86F5-AFFF-D34F-C00E-FF70FD664E50}"/>
+                <a16:creationId xmlns:a16="http://schemas.microsoft.com/office/drawing/2014/main" id="{8372F0FB-61A1-7F16-F87F-3A3A36C14E0E}"/>
               </a:ext>
             </a:extLst>
           </p:cNvPr>
@@ -957,7 +957,7 @@
           <a:bodyPr/>
           <a:lstStyle/>
           <a:p>
-            <a:fld id="{65ABD7D7-2CB2-4624-B8BF-4AB23DDE74CA}" type="datetimeFigureOut">
+            <a:fld id="{0C46D9D4-C34E-4A15-ABC0-E0E2A34940EA}" type="datetimeFigureOut">
               <a:rPr kumimoji="1" lang="ja-JP" altLang="en-US" smtClean="0"/>
               <a:t>2026/7/30</a:t>
             </a:fld>
@@ -970,7 +970,7 @@
           <p:cNvPr id="5" name="フッター プレースホルダー 4">
             <a:extLst>
               <a:ext uri="{FF2B5EF4-FFF2-40B4-BE49-F238E27FC236}">
-                <a16:creationId xmlns:a16="http://schemas.microsoft.com/office/drawing/2014/main" id="{B785FB92-D089-77D2-3853-DEBE9B7D1AF5}"/>
+                <a16:creationId xmlns:a16="http://schemas.microsoft.com/office/drawing/2014/main" id="{959AD515-5421-F4EA-03B2-545A80FAE027}"/>
               </a:ext>
             </a:extLst>
           </p:cNvPr>
@@ -995,7 +995,7 @@
           <p:cNvPr id="6" name="スライド番号プレースホルダー 5">
             <a:extLst>
               <a:ext uri="{FF2B5EF4-FFF2-40B4-BE49-F238E27FC236}">
-                <a16:creationId xmlns:a16="http://schemas.microsoft.com/office/drawing/2014/main" id="{435971B1-7897-6289-429D-7FDA01783DCD}"/>
+                <a16:creationId xmlns:a16="http://schemas.microsoft.com/office/drawing/2014/main" id="{9612DE81-7FDD-D12B-4BE5-ED038B7FC64E}"/>
               </a:ext>
             </a:extLst>
           </p:cNvPr>
@@ -1011,7 +1011,7 @@
           <a:bodyPr/>
           <a:lstStyle/>
           <a:p>
-            <a:fld id="{94A46EC2-24A0-4D7E-8FEF-496A3CB3A35B}" type="slidenum">
+            <a:fld id="{3E531130-47C0-4870-AFFD-43BC7F3D2CAC}" type="slidenum">
               <a:rPr kumimoji="1" lang="ja-JP" altLang="en-US" smtClean="0"/>
               <a:t>‹#›</a:t>
             </a:fld>
@@ -1022,7 +1022,7 @@
     </p:spTree>
     <p:extLst>
       <p:ext uri="{BB962C8B-B14F-4D97-AF65-F5344CB8AC3E}">
-        <p14:creationId xmlns:p14="http://schemas.microsoft.com/office/powerpoint/2010/main" val="3694482131"/>
+        <p14:creationId xmlns:p14="http://schemas.microsoft.com/office/powerpoint/2010/main" val="574144599"/>
       </p:ext>
     </p:extLst>
   </p:cSld>
@@ -1054,7 +1054,7 @@
           <p:cNvPr id="2" name="タイトル 1">
             <a:extLst>
               <a:ext uri="{FF2B5EF4-FFF2-40B4-BE49-F238E27FC236}">
-                <a16:creationId xmlns:a16="http://schemas.microsoft.com/office/drawing/2014/main" id="{CFB051EE-8291-B45F-15D4-00A2DB500391}"/>
+                <a16:creationId xmlns:a16="http://schemas.microsoft.com/office/drawing/2014/main" id="{91A85F72-86EC-3F71-B415-E8FAB33B3460}"/>
               </a:ext>
             </a:extLst>
           </p:cNvPr>
@@ -1091,7 +1091,7 @@
           <p:cNvPr id="3" name="テキスト プレースホルダー 2">
             <a:extLst>
               <a:ext uri="{FF2B5EF4-FFF2-40B4-BE49-F238E27FC236}">
-                <a16:creationId xmlns:a16="http://schemas.microsoft.com/office/drawing/2014/main" id="{C4702F5D-866E-E7D5-D3A8-2A1E2FB0B55B}"/>
+                <a16:creationId xmlns:a16="http://schemas.microsoft.com/office/drawing/2014/main" id="{0D9FB6B8-7551-9EFC-4D5D-B8C61FB8A969}"/>
               </a:ext>
             </a:extLst>
           </p:cNvPr>
@@ -1216,7 +1216,7 @@
           <p:cNvPr id="4" name="日付プレースホルダー 3">
             <a:extLst>
               <a:ext uri="{FF2B5EF4-FFF2-40B4-BE49-F238E27FC236}">
-                <a16:creationId xmlns:a16="http://schemas.microsoft.com/office/drawing/2014/main" id="{25C0A851-FE62-D809-68C8-C0CE8791E6CD}"/>
+                <a16:creationId xmlns:a16="http://schemas.microsoft.com/office/drawing/2014/main" id="{E7A492E6-FC26-CA1C-8A2D-7594F965BE25}"/>
               </a:ext>
             </a:extLst>
           </p:cNvPr>
@@ -1232,7 +1232,7 @@
           <a:bodyPr/>
           <a:lstStyle/>
           <a:p>
-            <a:fld id="{65ABD7D7-2CB2-4624-B8BF-4AB23DDE74CA}" type="datetimeFigureOut">
+            <a:fld id="{0C46D9D4-C34E-4A15-ABC0-E0E2A34940EA}" type="datetimeFigureOut">
               <a:rPr kumimoji="1" lang="ja-JP" altLang="en-US" smtClean="0"/>
               <a:t>2026/7/30</a:t>
             </a:fld>
@@ -1245,7 +1245,7 @@
           <p:cNvPr id="5" name="フッター プレースホルダー 4">
             <a:extLst>
               <a:ext uri="{FF2B5EF4-FFF2-40B4-BE49-F238E27FC236}">
-                <a16:creationId xmlns:a16="http://schemas.microsoft.com/office/drawing/2014/main" id="{20BE9731-43FE-9FF1-D7D6-40B4D96C1B9F}"/>
+                <a16:creationId xmlns:a16="http://schemas.microsoft.com/office/drawing/2014/main" id="{6583BF66-B151-EE32-B1F6-F2834E8041A0}"/>
               </a:ext>
             </a:extLst>
           </p:cNvPr>
@@ -1270,7 +1270,7 @@
           <p:cNvPr id="6" name="スライド番号プレースホルダー 5">
             <a:extLst>
               <a:ext uri="{FF2B5EF4-FFF2-40B4-BE49-F238E27FC236}">
-                <a16:creationId xmlns:a16="http://schemas.microsoft.com/office/drawing/2014/main" id="{88878723-FDC5-D345-D39E-F98ABB349D51}"/>
+                <a16:creationId xmlns:a16="http://schemas.microsoft.com/office/drawing/2014/main" id="{819C1E9C-DC24-ABD8-3E15-5465A57BDD85}"/>
               </a:ext>
             </a:extLst>
           </p:cNvPr>
@@ -1286,7 +1286,7 @@
           <a:bodyPr/>
           <a:lstStyle/>
           <a:p>
-            <a:fld id="{94A46EC2-24A0-4D7E-8FEF-496A3CB3A35B}" type="slidenum">
+            <a:fld id="{3E531130-47C0-4870-AFFD-43BC7F3D2CAC}" type="slidenum">
               <a:rPr kumimoji="1" lang="ja-JP" altLang="en-US" smtClean="0"/>
               <a:t>‹#›</a:t>
             </a:fld>
@@ -1297,7 +1297,7 @@
     </p:spTree>
     <p:extLst>
       <p:ext uri="{BB962C8B-B14F-4D97-AF65-F5344CB8AC3E}">
-        <p14:creationId xmlns:p14="http://schemas.microsoft.com/office/powerpoint/2010/main" val="56577712"/>
+        <p14:creationId xmlns:p14="http://schemas.microsoft.com/office/powerpoint/2010/main" val="1161653992"/>
       </p:ext>
     </p:extLst>
   </p:cSld>
@@ -1329,7 +1329,7 @@
           <p:cNvPr id="2" name="タイトル 1">
             <a:extLst>
               <a:ext uri="{FF2B5EF4-FFF2-40B4-BE49-F238E27FC236}">
-                <a16:creationId xmlns:a16="http://schemas.microsoft.com/office/drawing/2014/main" id="{A4450FBF-1FD4-3682-B553-44EE9FE7D22A}"/>
+                <a16:creationId xmlns:a16="http://schemas.microsoft.com/office/drawing/2014/main" id="{C9CC131A-E6C8-9F88-597E-0EE5D2DE7854}"/>
               </a:ext>
             </a:extLst>
           </p:cNvPr>
@@ -1357,7 +1357,7 @@
           <p:cNvPr id="3" name="コンテンツ プレースホルダー 2">
             <a:extLst>
               <a:ext uri="{FF2B5EF4-FFF2-40B4-BE49-F238E27FC236}">
-                <a16:creationId xmlns:a16="http://schemas.microsoft.com/office/drawing/2014/main" id="{805B4AD8-2DC6-84FC-0EEA-8C253AE1F13F}"/>
+                <a16:creationId xmlns:a16="http://schemas.microsoft.com/office/drawing/2014/main" id="{0460253F-6D74-7389-FE91-12C1D4AA8F89}"/>
               </a:ext>
             </a:extLst>
           </p:cNvPr>
@@ -1451,7 +1451,7 @@
           <p:cNvPr id="4" name="コンテンツ プレースホルダー 3">
             <a:extLst>
               <a:ext uri="{FF2B5EF4-FFF2-40B4-BE49-F238E27FC236}">
-                <a16:creationId xmlns:a16="http://schemas.microsoft.com/office/drawing/2014/main" id="{6B734830-0DA8-D245-86D6-690329BFF405}"/>
+                <a16:creationId xmlns:a16="http://schemas.microsoft.com/office/drawing/2014/main" id="{C4F3D5E2-FCE8-E2D3-4904-4D7C829C0A9C}"/>
               </a:ext>
             </a:extLst>
           </p:cNvPr>
@@ -1545,7 +1545,7 @@
           <p:cNvPr id="5" name="日付プレースホルダー 4">
             <a:extLst>
               <a:ext uri="{FF2B5EF4-FFF2-40B4-BE49-F238E27FC236}">
-                <a16:creationId xmlns:a16="http://schemas.microsoft.com/office/drawing/2014/main" id="{81559092-B0A9-8DCE-7560-D283D816726F}"/>
+                <a16:creationId xmlns:a16="http://schemas.microsoft.com/office/drawing/2014/main" id="{C64D77F7-8348-6713-6702-3041960EAF26}"/>
               </a:ext>
             </a:extLst>
           </p:cNvPr>
@@ -1561,7 +1561,7 @@
           <a:bodyPr/>
           <a:lstStyle/>
           <a:p>
-            <a:fld id="{65ABD7D7-2CB2-4624-B8BF-4AB23DDE74CA}" type="datetimeFigureOut">
+            <a:fld id="{0C46D9D4-C34E-4A15-ABC0-E0E2A34940EA}" type="datetimeFigureOut">
               <a:rPr kumimoji="1" lang="ja-JP" altLang="en-US" smtClean="0"/>
               <a:t>2026/7/30</a:t>
             </a:fld>
@@ -1574,7 +1574,7 @@
           <p:cNvPr id="6" name="フッター プレースホルダー 5">
             <a:extLst>
               <a:ext uri="{FF2B5EF4-FFF2-40B4-BE49-F238E27FC236}">
-                <a16:creationId xmlns:a16="http://schemas.microsoft.com/office/drawing/2014/main" id="{ADEC9023-2DBE-DD2E-F411-DEDE764B2DB8}"/>
+                <a16:creationId xmlns:a16="http://schemas.microsoft.com/office/drawing/2014/main" id="{400B229B-F382-ABD2-EB7F-882B9A69FE81}"/>
               </a:ext>
             </a:extLst>
           </p:cNvPr>
@@ -1599,7 +1599,7 @@
           <p:cNvPr id="7" name="スライド番号プレースホルダー 6">
             <a:extLst>
               <a:ext uri="{FF2B5EF4-FFF2-40B4-BE49-F238E27FC236}">
-                <a16:creationId xmlns:a16="http://schemas.microsoft.com/office/drawing/2014/main" id="{25F462FE-E84F-EEFA-DEAD-3CBB7B2495D0}"/>
+                <a16:creationId xmlns:a16="http://schemas.microsoft.com/office/drawing/2014/main" id="{E90D58BF-AFC2-A61D-7CF7-7288517152B3}"/>
               </a:ext>
             </a:extLst>
           </p:cNvPr>
@@ -1615,7 +1615,7 @@
           <a:bodyPr/>
           <a:lstStyle/>
           <a:p>
-            <a:fld id="{94A46EC2-24A0-4D7E-8FEF-496A3CB3A35B}" type="slidenum">
+            <a:fld id="{3E531130-47C0-4870-AFFD-43BC7F3D2CAC}" type="slidenum">
               <a:rPr kumimoji="1" lang="ja-JP" altLang="en-US" smtClean="0"/>
               <a:t>‹#›</a:t>
             </a:fld>
@@ -1626,7 +1626,7 @@
     </p:spTree>
     <p:extLst>
       <p:ext uri="{BB962C8B-B14F-4D97-AF65-F5344CB8AC3E}">
-        <p14:creationId xmlns:p14="http://schemas.microsoft.com/office/powerpoint/2010/main" val="3369893848"/>
+        <p14:creationId xmlns:p14="http://schemas.microsoft.com/office/powerpoint/2010/main" val="699308829"/>
       </p:ext>
     </p:extLst>
   </p:cSld>
@@ -1658,7 +1658,7 @@
           <p:cNvPr id="2" name="タイトル 1">
             <a:extLst>
               <a:ext uri="{FF2B5EF4-FFF2-40B4-BE49-F238E27FC236}">
-                <a16:creationId xmlns:a16="http://schemas.microsoft.com/office/drawing/2014/main" id="{0559C827-3D01-9ABB-138C-0474421C60BD}"/>
+                <a16:creationId xmlns:a16="http://schemas.microsoft.com/office/drawing/2014/main" id="{10FD3635-66F9-7DE7-E803-A4B04A957B8B}"/>
               </a:ext>
             </a:extLst>
           </p:cNvPr>
@@ -1691,7 +1691,7 @@
           <p:cNvPr id="3" name="テキスト プレースホルダー 2">
             <a:extLst>
               <a:ext uri="{FF2B5EF4-FFF2-40B4-BE49-F238E27FC236}">
-                <a16:creationId xmlns:a16="http://schemas.microsoft.com/office/drawing/2014/main" id="{E5751D32-E2EB-DBC1-D554-08EEB335E7D6}"/>
+                <a16:creationId xmlns:a16="http://schemas.microsoft.com/office/drawing/2014/main" id="{87F4302A-0B47-39C1-F925-58F03483016F}"/>
               </a:ext>
             </a:extLst>
           </p:cNvPr>
@@ -1762,7 +1762,7 @@
           <p:cNvPr id="4" name="コンテンツ プレースホルダー 3">
             <a:extLst>
               <a:ext uri="{FF2B5EF4-FFF2-40B4-BE49-F238E27FC236}">
-                <a16:creationId xmlns:a16="http://schemas.microsoft.com/office/drawing/2014/main" id="{EA79531A-C773-A5B7-0AA4-DD1FC7AC1A3C}"/>
+                <a16:creationId xmlns:a16="http://schemas.microsoft.com/office/drawing/2014/main" id="{28396F4D-5450-A7BE-14A8-1CD7E36628E8}"/>
               </a:ext>
             </a:extLst>
           </p:cNvPr>
@@ -1856,7 +1856,7 @@
           <p:cNvPr id="5" name="テキスト プレースホルダー 4">
             <a:extLst>
               <a:ext uri="{FF2B5EF4-FFF2-40B4-BE49-F238E27FC236}">
-                <a16:creationId xmlns:a16="http://schemas.microsoft.com/office/drawing/2014/main" id="{FB6B6673-87C7-96BE-38BF-4DD8D1609EA2}"/>
+                <a16:creationId xmlns:a16="http://schemas.microsoft.com/office/drawing/2014/main" id="{9B404685-B178-5845-8AEE-8C615A973745}"/>
               </a:ext>
             </a:extLst>
           </p:cNvPr>
@@ -1927,7 +1927,7 @@
           <p:cNvPr id="6" name="コンテンツ プレースホルダー 5">
             <a:extLst>
               <a:ext uri="{FF2B5EF4-FFF2-40B4-BE49-F238E27FC236}">
-                <a16:creationId xmlns:a16="http://schemas.microsoft.com/office/drawing/2014/main" id="{D2FF0576-5E95-11A5-6C96-E2F03D6EEFB0}"/>
+                <a16:creationId xmlns:a16="http://schemas.microsoft.com/office/drawing/2014/main" id="{467EF8A1-DB73-5AFA-D26B-BC35646BD00E}"/>
               </a:ext>
             </a:extLst>
           </p:cNvPr>
@@ -2021,7 +2021,7 @@
           <p:cNvPr id="7" name="日付プレースホルダー 6">
             <a:extLst>
               <a:ext uri="{FF2B5EF4-FFF2-40B4-BE49-F238E27FC236}">
-                <a16:creationId xmlns:a16="http://schemas.microsoft.com/office/drawing/2014/main" id="{16AC526C-604A-7D28-198F-39CED48FCB39}"/>
+                <a16:creationId xmlns:a16="http://schemas.microsoft.com/office/drawing/2014/main" id="{545FFD7E-7C79-3372-43BA-DB4B415A0380}"/>
               </a:ext>
             </a:extLst>
           </p:cNvPr>
@@ -2037,7 +2037,7 @@
           <a:bodyPr/>
           <a:lstStyle/>
           <a:p>
-            <a:fld id="{65ABD7D7-2CB2-4624-B8BF-4AB23DDE74CA}" type="datetimeFigureOut">
+            <a:fld id="{0C46D9D4-C34E-4A15-ABC0-E0E2A34940EA}" type="datetimeFigureOut">
               <a:rPr kumimoji="1" lang="ja-JP" altLang="en-US" smtClean="0"/>
               <a:t>2026/7/30</a:t>
             </a:fld>
@@ -2050,7 +2050,7 @@
           <p:cNvPr id="8" name="フッター プレースホルダー 7">
             <a:extLst>
               <a:ext uri="{FF2B5EF4-FFF2-40B4-BE49-F238E27FC236}">
-                <a16:creationId xmlns:a16="http://schemas.microsoft.com/office/drawing/2014/main" id="{1F48FA9A-5F42-93A0-B5A5-145B7D4CDFE8}"/>
+                <a16:creationId xmlns:a16="http://schemas.microsoft.com/office/drawing/2014/main" id="{B0172C19-7A4D-009E-5E49-3ADE293059E9}"/>
               </a:ext>
             </a:extLst>
           </p:cNvPr>
@@ -2075,7 +2075,7 @@
           <p:cNvPr id="9" name="スライド番号プレースホルダー 8">
             <a:extLst>
               <a:ext uri="{FF2B5EF4-FFF2-40B4-BE49-F238E27FC236}">
-                <a16:creationId xmlns:a16="http://schemas.microsoft.com/office/drawing/2014/main" id="{3353E299-0189-546E-0EA9-D86C9FE50C96}"/>
+                <a16:creationId xmlns:a16="http://schemas.microsoft.com/office/drawing/2014/main" id="{45D4AC4E-BF01-0F9B-EFC0-D6AA85BB947C}"/>
               </a:ext>
             </a:extLst>
           </p:cNvPr>
@@ -2091,7 +2091,7 @@
           <a:bodyPr/>
           <a:lstStyle/>
           <a:p>
-            <a:fld id="{94A46EC2-24A0-4D7E-8FEF-496A3CB3A35B}" type="slidenum">
+            <a:fld id="{3E531130-47C0-4870-AFFD-43BC7F3D2CAC}" type="slidenum">
               <a:rPr kumimoji="1" lang="ja-JP" altLang="en-US" smtClean="0"/>
               <a:t>‹#›</a:t>
             </a:fld>
@@ -2102,7 +2102,7 @@
     </p:spTree>
     <p:extLst>
       <p:ext uri="{BB962C8B-B14F-4D97-AF65-F5344CB8AC3E}">
-        <p14:creationId xmlns:p14="http://schemas.microsoft.com/office/powerpoint/2010/main" val="3485973234"/>
+        <p14:creationId xmlns:p14="http://schemas.microsoft.com/office/powerpoint/2010/main" val="2639777717"/>
       </p:ext>
     </p:extLst>
   </p:cSld>
@@ -2134,7 +2134,7 @@
           <p:cNvPr id="2" name="タイトル 1">
             <a:extLst>
               <a:ext uri="{FF2B5EF4-FFF2-40B4-BE49-F238E27FC236}">
-                <a16:creationId xmlns:a16="http://schemas.microsoft.com/office/drawing/2014/main" id="{7F2BDA44-29E6-0126-B520-05C62D1771F9}"/>
+                <a16:creationId xmlns:a16="http://schemas.microsoft.com/office/drawing/2014/main" id="{42BFE43C-8B9F-C254-DC0F-B480E9A680D8}"/>
               </a:ext>
             </a:extLst>
           </p:cNvPr>
@@ -2162,7 +2162,7 @@
           <p:cNvPr id="3" name="日付プレースホルダー 2">
             <a:extLst>
               <a:ext uri="{FF2B5EF4-FFF2-40B4-BE49-F238E27FC236}">
-                <a16:creationId xmlns:a16="http://schemas.microsoft.com/office/drawing/2014/main" id="{86C52A75-434E-14BD-6B40-0A2364747639}"/>
+                <a16:creationId xmlns:a16="http://schemas.microsoft.com/office/drawing/2014/main" id="{9B0C398A-CA95-548B-3D1B-59DF555DE462}"/>
               </a:ext>
             </a:extLst>
           </p:cNvPr>
@@ -2178,7 +2178,7 @@
           <a:bodyPr/>
           <a:lstStyle/>
           <a:p>
-            <a:fld id="{65ABD7D7-2CB2-4624-B8BF-4AB23DDE74CA}" type="datetimeFigureOut">
+            <a:fld id="{0C46D9D4-C34E-4A15-ABC0-E0E2A34940EA}" type="datetimeFigureOut">
               <a:rPr kumimoji="1" lang="ja-JP" altLang="en-US" smtClean="0"/>
               <a:t>2026/7/30</a:t>
             </a:fld>
@@ -2191,7 +2191,7 @@
           <p:cNvPr id="4" name="フッター プレースホルダー 3">
             <a:extLst>
               <a:ext uri="{FF2B5EF4-FFF2-40B4-BE49-F238E27FC236}">
-                <a16:creationId xmlns:a16="http://schemas.microsoft.com/office/drawing/2014/main" id="{7C7F5294-4AE4-9DA9-9F5B-4E67598BAE22}"/>
+                <a16:creationId xmlns:a16="http://schemas.microsoft.com/office/drawing/2014/main" id="{4A578132-8D2D-5D6A-A270-00EFEFF99D9B}"/>
               </a:ext>
             </a:extLst>
           </p:cNvPr>
@@ -2216,7 +2216,7 @@
           <p:cNvPr id="5" name="スライド番号プレースホルダー 4">
             <a:extLst>
               <a:ext uri="{FF2B5EF4-FFF2-40B4-BE49-F238E27FC236}">
-                <a16:creationId xmlns:a16="http://schemas.microsoft.com/office/drawing/2014/main" id="{E1D3325A-9C34-E1BB-7311-30DD2D991E32}"/>
+                <a16:creationId xmlns:a16="http://schemas.microsoft.com/office/drawing/2014/main" id="{46E43BA8-84D2-3454-1D71-4F15FD844D00}"/>
               </a:ext>
             </a:extLst>
           </p:cNvPr>
@@ -2232,7 +2232,7 @@
           <a:bodyPr/>
           <a:lstStyle/>
           <a:p>
-            <a:fld id="{94A46EC2-24A0-4D7E-8FEF-496A3CB3A35B}" type="slidenum">
+            <a:fld id="{3E531130-47C0-4870-AFFD-43BC7F3D2CAC}" type="slidenum">
               <a:rPr kumimoji="1" lang="ja-JP" altLang="en-US" smtClean="0"/>
               <a:t>‹#›</a:t>
             </a:fld>
@@ -2243,7 +2243,7 @@
     </p:spTree>
     <p:extLst>
       <p:ext uri="{BB962C8B-B14F-4D97-AF65-F5344CB8AC3E}">
-        <p14:creationId xmlns:p14="http://schemas.microsoft.com/office/powerpoint/2010/main" val="4251662295"/>
+        <p14:creationId xmlns:p14="http://schemas.microsoft.com/office/powerpoint/2010/main" val="2523680010"/>
       </p:ext>
     </p:extLst>
   </p:cSld>
@@ -2275,7 +2275,7 @@
           <p:cNvPr id="2" name="日付プレースホルダー 1">
             <a:extLst>
               <a:ext uri="{FF2B5EF4-FFF2-40B4-BE49-F238E27FC236}">
-                <a16:creationId xmlns:a16="http://schemas.microsoft.com/office/drawing/2014/main" id="{EF8C8791-D42B-3A7E-1694-5BB2AEAAFFE7}"/>
+                <a16:creationId xmlns:a16="http://schemas.microsoft.com/office/drawing/2014/main" id="{6CC7BC6E-0BD8-1504-D551-829FE4EF30D0}"/>
               </a:ext>
             </a:extLst>
           </p:cNvPr>
@@ -2291,7 +2291,7 @@
           <a:bodyPr/>
           <a:lstStyle/>
           <a:p>
-            <a:fld id="{65ABD7D7-2CB2-4624-B8BF-4AB23DDE74CA}" type="datetimeFigureOut">
+            <a:fld id="{0C46D9D4-C34E-4A15-ABC0-E0E2A34940EA}" type="datetimeFigureOut">
               <a:rPr kumimoji="1" lang="ja-JP" altLang="en-US" smtClean="0"/>
               <a:t>2026/7/30</a:t>
             </a:fld>
@@ -2304,7 +2304,7 @@
           <p:cNvPr id="3" name="フッター プレースホルダー 2">
             <a:extLst>
               <a:ext uri="{FF2B5EF4-FFF2-40B4-BE49-F238E27FC236}">
-                <a16:creationId xmlns:a16="http://schemas.microsoft.com/office/drawing/2014/main" id="{4F74850F-358C-BB8E-C917-2298B20B7DF0}"/>
+                <a16:creationId xmlns:a16="http://schemas.microsoft.com/office/drawing/2014/main" id="{C5013AFF-FD5C-AD70-420E-71D38C1E4C5A}"/>
               </a:ext>
             </a:extLst>
           </p:cNvPr>
@@ -2329,7 +2329,7 @@
           <p:cNvPr id="4" name="スライド番号プレースホルダー 3">
             <a:extLst>
               <a:ext uri="{FF2B5EF4-FFF2-40B4-BE49-F238E27FC236}">
-                <a16:creationId xmlns:a16="http://schemas.microsoft.com/office/drawing/2014/main" id="{FCF4CBDD-2561-A092-4E5A-D44A2DEB831E}"/>
+                <a16:creationId xmlns:a16="http://schemas.microsoft.com/office/drawing/2014/main" id="{EC6DF251-45F2-5D1C-BA59-B93CDD3E3227}"/>
               </a:ext>
             </a:extLst>
           </p:cNvPr>
@@ -2345,7 +2345,7 @@
           <a:bodyPr/>
           <a:lstStyle/>
           <a:p>
-            <a:fld id="{94A46EC2-24A0-4D7E-8FEF-496A3CB3A35B}" type="slidenum">
+            <a:fld id="{3E531130-47C0-4870-AFFD-43BC7F3D2CAC}" type="slidenum">
               <a:rPr kumimoji="1" lang="ja-JP" altLang="en-US" smtClean="0"/>
               <a:t>‹#›</a:t>
             </a:fld>
@@ -2356,7 +2356,7 @@
     </p:spTree>
     <p:extLst>
       <p:ext uri="{BB962C8B-B14F-4D97-AF65-F5344CB8AC3E}">
-        <p14:creationId xmlns:p14="http://schemas.microsoft.com/office/powerpoint/2010/main" val="81568932"/>
+        <p14:creationId xmlns:p14="http://schemas.microsoft.com/office/powerpoint/2010/main" val="3357529282"/>
       </p:ext>
     </p:extLst>
   </p:cSld>
@@ -2388,7 +2388,7 @@
           <p:cNvPr id="2" name="タイトル 1">
             <a:extLst>
               <a:ext uri="{FF2B5EF4-FFF2-40B4-BE49-F238E27FC236}">
-                <a16:creationId xmlns:a16="http://schemas.microsoft.com/office/drawing/2014/main" id="{E881DC8D-7EC8-FF0E-15EB-39D3CBE1A3DC}"/>
+                <a16:creationId xmlns:a16="http://schemas.microsoft.com/office/drawing/2014/main" id="{DABE27FC-D63B-B809-2FAA-2CEC3EAAA49A}"/>
               </a:ext>
             </a:extLst>
           </p:cNvPr>
@@ -2425,7 +2425,7 @@
           <p:cNvPr id="3" name="コンテンツ プレースホルダー 2">
             <a:extLst>
               <a:ext uri="{FF2B5EF4-FFF2-40B4-BE49-F238E27FC236}">
-                <a16:creationId xmlns:a16="http://schemas.microsoft.com/office/drawing/2014/main" id="{49A517D4-8AA6-3FB2-1A19-A5FBB5AEC3D8}"/>
+                <a16:creationId xmlns:a16="http://schemas.microsoft.com/office/drawing/2014/main" id="{7CC6DAAB-B397-544F-37B9-7B13CACEAFFC}"/>
               </a:ext>
             </a:extLst>
           </p:cNvPr>
@@ -2547,7 +2547,7 @@
           <p:cNvPr id="4" name="テキスト プレースホルダー 3">
             <a:extLst>
               <a:ext uri="{FF2B5EF4-FFF2-40B4-BE49-F238E27FC236}">
-                <a16:creationId xmlns:a16="http://schemas.microsoft.com/office/drawing/2014/main" id="{20E51464-E93B-F1C3-F073-D78FB3E54A9A}"/>
+                <a16:creationId xmlns:a16="http://schemas.microsoft.com/office/drawing/2014/main" id="{DD4BC402-5876-C777-7873-6D3DB95229A6}"/>
               </a:ext>
             </a:extLst>
           </p:cNvPr>
@@ -2618,7 +2618,7 @@
           <p:cNvPr id="5" name="日付プレースホルダー 4">
             <a:extLst>
               <a:ext uri="{FF2B5EF4-FFF2-40B4-BE49-F238E27FC236}">
-                <a16:creationId xmlns:a16="http://schemas.microsoft.com/office/drawing/2014/main" id="{93083E75-4E16-831D-34DC-C88BDDD33CF9}"/>
+                <a16:creationId xmlns:a16="http://schemas.microsoft.com/office/drawing/2014/main" id="{AE8FADF3-1170-C70B-34FB-4D06818E2098}"/>
               </a:ext>
             </a:extLst>
           </p:cNvPr>
@@ -2634,7 +2634,7 @@
           <a:bodyPr/>
           <a:lstStyle/>
           <a:p>
-            <a:fld id="{65ABD7D7-2CB2-4624-B8BF-4AB23DDE74CA}" type="datetimeFigureOut">
+            <a:fld id="{0C46D9D4-C34E-4A15-ABC0-E0E2A34940EA}" type="datetimeFigureOut">
               <a:rPr kumimoji="1" lang="ja-JP" altLang="en-US" smtClean="0"/>
               <a:t>2026/7/30</a:t>
             </a:fld>
@@ -2647,7 +2647,7 @@
           <p:cNvPr id="6" name="フッター プレースホルダー 5">
             <a:extLst>
               <a:ext uri="{FF2B5EF4-FFF2-40B4-BE49-F238E27FC236}">
-                <a16:creationId xmlns:a16="http://schemas.microsoft.com/office/drawing/2014/main" id="{500D6FE7-1D88-ED84-D4CE-DD1E5C0FB93B}"/>
+                <a16:creationId xmlns:a16="http://schemas.microsoft.com/office/drawing/2014/main" id="{0FEF65F6-E240-C1C6-A615-FA270F1E8C68}"/>
               </a:ext>
             </a:extLst>
           </p:cNvPr>
@@ -2672,7 +2672,7 @@
           <p:cNvPr id="7" name="スライド番号プレースホルダー 6">
             <a:extLst>
               <a:ext uri="{FF2B5EF4-FFF2-40B4-BE49-F238E27FC236}">
-                <a16:creationId xmlns:a16="http://schemas.microsoft.com/office/drawing/2014/main" id="{E3D7E9FB-1BA8-422D-FB48-42BE702778F1}"/>
+                <a16:creationId xmlns:a16="http://schemas.microsoft.com/office/drawing/2014/main" id="{38AE0361-4125-127C-99CE-E8D07D5097C2}"/>
               </a:ext>
             </a:extLst>
           </p:cNvPr>
@@ -2688,7 +2688,7 @@
           <a:bodyPr/>
           <a:lstStyle/>
           <a:p>
-            <a:fld id="{94A46EC2-24A0-4D7E-8FEF-496A3CB3A35B}" type="slidenum">
+            <a:fld id="{3E531130-47C0-4870-AFFD-43BC7F3D2CAC}" type="slidenum">
               <a:rPr kumimoji="1" lang="ja-JP" altLang="en-US" smtClean="0"/>
               <a:t>‹#›</a:t>
             </a:fld>
@@ -2699,7 +2699,7 @@
     </p:spTree>
     <p:extLst>
       <p:ext uri="{BB962C8B-B14F-4D97-AF65-F5344CB8AC3E}">
-        <p14:creationId xmlns:p14="http://schemas.microsoft.com/office/powerpoint/2010/main" val="376115784"/>
+        <p14:creationId xmlns:p14="http://schemas.microsoft.com/office/powerpoint/2010/main" val="1979801464"/>
       </p:ext>
     </p:extLst>
   </p:cSld>
@@ -2731,7 +2731,7 @@
           <p:cNvPr id="2" name="タイトル 1">
             <a:extLst>
               <a:ext uri="{FF2B5EF4-FFF2-40B4-BE49-F238E27FC236}">
-                <a16:creationId xmlns:a16="http://schemas.microsoft.com/office/drawing/2014/main" id="{D5F845DA-068F-10BD-9BF6-418077F574D6}"/>
+                <a16:creationId xmlns:a16="http://schemas.microsoft.com/office/drawing/2014/main" id="{1B5FDBE9-937C-E688-F6CE-B07DC4267A37}"/>
               </a:ext>
             </a:extLst>
           </p:cNvPr>
@@ -2768,7 +2768,7 @@
           <p:cNvPr id="3" name="図プレースホルダー 2">
             <a:extLst>
               <a:ext uri="{FF2B5EF4-FFF2-40B4-BE49-F238E27FC236}">
-                <a16:creationId xmlns:a16="http://schemas.microsoft.com/office/drawing/2014/main" id="{BA084000-FA7A-6D18-62EA-33AC0C58C103}"/>
+                <a16:creationId xmlns:a16="http://schemas.microsoft.com/office/drawing/2014/main" id="{40F7B286-13F6-A801-F4C1-5A6226D3548A}"/>
               </a:ext>
             </a:extLst>
           </p:cNvPr>
@@ -2835,7 +2835,7 @@
           <p:cNvPr id="4" name="テキスト プレースホルダー 3">
             <a:extLst>
               <a:ext uri="{FF2B5EF4-FFF2-40B4-BE49-F238E27FC236}">
-                <a16:creationId xmlns:a16="http://schemas.microsoft.com/office/drawing/2014/main" id="{8934D7EF-8843-4593-DCE8-B972F5E9C8CA}"/>
+                <a16:creationId xmlns:a16="http://schemas.microsoft.com/office/drawing/2014/main" id="{C96600AE-28EA-927B-690A-BA6296985AD3}"/>
               </a:ext>
             </a:extLst>
           </p:cNvPr>
@@ -2906,7 +2906,7 @@
           <p:cNvPr id="5" name="日付プレースホルダー 4">
             <a:extLst>
               <a:ext uri="{FF2B5EF4-FFF2-40B4-BE49-F238E27FC236}">
-                <a16:creationId xmlns:a16="http://schemas.microsoft.com/office/drawing/2014/main" id="{00936C4F-AC36-3A82-5AD8-B5B4ACB18CD3}"/>
+                <a16:creationId xmlns:a16="http://schemas.microsoft.com/office/drawing/2014/main" id="{C41E83AE-6BA5-188A-0793-93E0E25D7B55}"/>
               </a:ext>
             </a:extLst>
           </p:cNvPr>
@@ -2922,7 +2922,7 @@
           <a:bodyPr/>
           <a:lstStyle/>
           <a:p>
-            <a:fld id="{65ABD7D7-2CB2-4624-B8BF-4AB23DDE74CA}" type="datetimeFigureOut">
+            <a:fld id="{0C46D9D4-C34E-4A15-ABC0-E0E2A34940EA}" type="datetimeFigureOut">
               <a:rPr kumimoji="1" lang="ja-JP" altLang="en-US" smtClean="0"/>
               <a:t>2026/7/30</a:t>
             </a:fld>
@@ -2935,7 +2935,7 @@
           <p:cNvPr id="6" name="フッター プレースホルダー 5">
             <a:extLst>
               <a:ext uri="{FF2B5EF4-FFF2-40B4-BE49-F238E27FC236}">
-                <a16:creationId xmlns:a16="http://schemas.microsoft.com/office/drawing/2014/main" id="{06D6617E-4363-0E6C-D1BB-48F22ECC8A69}"/>
+                <a16:creationId xmlns:a16="http://schemas.microsoft.com/office/drawing/2014/main" id="{215FF0B1-448D-0317-3738-3FAA81B2A168}"/>
               </a:ext>
             </a:extLst>
           </p:cNvPr>
@@ -2960,7 +2960,7 @@
           <p:cNvPr id="7" name="スライド番号プレースホルダー 6">
             <a:extLst>
               <a:ext uri="{FF2B5EF4-FFF2-40B4-BE49-F238E27FC236}">
-                <a16:creationId xmlns:a16="http://schemas.microsoft.com/office/drawing/2014/main" id="{C057D929-A825-2A47-656D-8D490A273C94}"/>
+                <a16:creationId xmlns:a16="http://schemas.microsoft.com/office/drawing/2014/main" id="{F7834E22-55AC-CF7B-0797-C5C9A9CA14F8}"/>
               </a:ext>
             </a:extLst>
           </p:cNvPr>
@@ -2976,7 +2976,7 @@
           <a:bodyPr/>
           <a:lstStyle/>
           <a:p>
-            <a:fld id="{94A46EC2-24A0-4D7E-8FEF-496A3CB3A35B}" type="slidenum">
+            <a:fld id="{3E531130-47C0-4870-AFFD-43BC7F3D2CAC}" type="slidenum">
               <a:rPr kumimoji="1" lang="ja-JP" altLang="en-US" smtClean="0"/>
               <a:t>‹#›</a:t>
             </a:fld>
@@ -2987,7 +2987,7 @@
     </p:spTree>
     <p:extLst>
       <p:ext uri="{BB962C8B-B14F-4D97-AF65-F5344CB8AC3E}">
-        <p14:creationId xmlns:p14="http://schemas.microsoft.com/office/powerpoint/2010/main" val="1075277558"/>
+        <p14:creationId xmlns:p14="http://schemas.microsoft.com/office/powerpoint/2010/main" val="3389743929"/>
       </p:ext>
     </p:extLst>
   </p:cSld>
@@ -3024,7 +3024,7 @@
           <p:cNvPr id="2" name="タイトル プレースホルダー 1">
             <a:extLst>
               <a:ext uri="{FF2B5EF4-FFF2-40B4-BE49-F238E27FC236}">
-                <a16:creationId xmlns:a16="http://schemas.microsoft.com/office/drawing/2014/main" id="{4958413A-EECD-F541-F38D-125B638F8DB5}"/>
+                <a16:creationId xmlns:a16="http://schemas.microsoft.com/office/drawing/2014/main" id="{E59E6673-A47F-4E43-9685-ED82A78B16A7}"/>
               </a:ext>
             </a:extLst>
           </p:cNvPr>
@@ -3062,7 +3062,7 @@
           <p:cNvPr id="3" name="テキスト プレースホルダー 2">
             <a:extLst>
               <a:ext uri="{FF2B5EF4-FFF2-40B4-BE49-F238E27FC236}">
-                <a16:creationId xmlns:a16="http://schemas.microsoft.com/office/drawing/2014/main" id="{2F180429-7336-7669-EBE6-1BD05743916D}"/>
+                <a16:creationId xmlns:a16="http://schemas.microsoft.com/office/drawing/2014/main" id="{7F63D64A-B446-A005-1E36-46253015990A}"/>
               </a:ext>
             </a:extLst>
           </p:cNvPr>
@@ -3161,7 +3161,7 @@
           <p:cNvPr id="4" name="日付プレースホルダー 3">
             <a:extLst>
               <a:ext uri="{FF2B5EF4-FFF2-40B4-BE49-F238E27FC236}">
-                <a16:creationId xmlns:a16="http://schemas.microsoft.com/office/drawing/2014/main" id="{A7A1A5F5-E91A-54BC-339A-EF398570D612}"/>
+                <a16:creationId xmlns:a16="http://schemas.microsoft.com/office/drawing/2014/main" id="{B3606581-9D6C-963C-516E-6F15DC74BE7D}"/>
               </a:ext>
             </a:extLst>
           </p:cNvPr>
@@ -3195,7 +3195,7 @@
             </a:lvl1pPr>
           </a:lstStyle>
           <a:p>
-            <a:fld id="{65ABD7D7-2CB2-4624-B8BF-4AB23DDE74CA}" type="datetimeFigureOut">
+            <a:fld id="{0C46D9D4-C34E-4A15-ABC0-E0E2A34940EA}" type="datetimeFigureOut">
               <a:rPr kumimoji="1" lang="ja-JP" altLang="en-US" smtClean="0"/>
               <a:t>2026/7/30</a:t>
             </a:fld>
@@ -3208,7 +3208,7 @@
           <p:cNvPr id="5" name="フッター プレースホルダー 4">
             <a:extLst>
               <a:ext uri="{FF2B5EF4-FFF2-40B4-BE49-F238E27FC236}">
-                <a16:creationId xmlns:a16="http://schemas.microsoft.com/office/drawing/2014/main" id="{D5DF223F-11E5-361F-E0A0-1C7BA9EF1183}"/>
+                <a16:creationId xmlns:a16="http://schemas.microsoft.com/office/drawing/2014/main" id="{719D563E-E065-2885-3CF7-5A7B7DC13790}"/>
               </a:ext>
             </a:extLst>
           </p:cNvPr>
@@ -3251,7 +3251,7 @@
           <p:cNvPr id="6" name="スライド番号プレースホルダー 5">
             <a:extLst>
               <a:ext uri="{FF2B5EF4-FFF2-40B4-BE49-F238E27FC236}">
-                <a16:creationId xmlns:a16="http://schemas.microsoft.com/office/drawing/2014/main" id="{B6A9E074-CA02-4FAC-9773-A4B76385E381}"/>
+                <a16:creationId xmlns:a16="http://schemas.microsoft.com/office/drawing/2014/main" id="{84EAD2DD-D350-31C6-FC32-8E56E4D98E3C}"/>
               </a:ext>
             </a:extLst>
           </p:cNvPr>
@@ -3285,7 +3285,7 @@
             </a:lvl1pPr>
           </a:lstStyle>
           <a:p>
-            <a:fld id="{94A46EC2-24A0-4D7E-8FEF-496A3CB3A35B}" type="slidenum">
+            <a:fld id="{3E531130-47C0-4870-AFFD-43BC7F3D2CAC}" type="slidenum">
               <a:rPr kumimoji="1" lang="ja-JP" altLang="en-US" smtClean="0"/>
               <a:t>‹#›</a:t>
             </a:fld>
@@ -3296,7 +3296,7 @@
     </p:spTree>
     <p:extLst>
       <p:ext uri="{BB962C8B-B14F-4D97-AF65-F5344CB8AC3E}">
-        <p14:creationId xmlns:p14="http://schemas.microsoft.com/office/powerpoint/2010/main" val="3791963840"/>
+        <p14:creationId xmlns:p14="http://schemas.microsoft.com/office/powerpoint/2010/main" val="393968645"/>
       </p:ext>
     </p:extLst>
   </p:cSld>
@@ -3619,7 +3619,7 @@
           <p:cNvPr id="2" name="テキスト ボックス 1">
             <a:extLst>
               <a:ext uri="{FF2B5EF4-FFF2-40B4-BE49-F238E27FC236}">
-                <a16:creationId xmlns:a16="http://schemas.microsoft.com/office/drawing/2014/main" id="{EC90FC6C-1FAC-4FCE-CCBF-37E2BBD14F61}"/>
+                <a16:creationId xmlns:a16="http://schemas.microsoft.com/office/drawing/2014/main" id="{91A61673-CE9D-D6AC-3CF7-57EF877BAFBE}"/>
               </a:ext>
             </a:extLst>
           </p:cNvPr>
@@ -3665,7 +3665,7 @@
           <p:cNvPr id="3" name="テキスト ボックス 2">
             <a:extLst>
               <a:ext uri="{FF2B5EF4-FFF2-40B4-BE49-F238E27FC236}">
-                <a16:creationId xmlns:a16="http://schemas.microsoft.com/office/drawing/2014/main" id="{04C49937-7C68-9A7E-AAD1-6B8B9AB952FF}"/>
+                <a16:creationId xmlns:a16="http://schemas.microsoft.com/office/drawing/2014/main" id="{F7B56F9F-454D-0E93-BD06-F5AC82F2C45A}"/>
               </a:ext>
             </a:extLst>
           </p:cNvPr>
@@ -3714,7 +3714,7 @@
           <p:cNvPr id="4" name="テキスト ボックス 3">
             <a:extLst>
               <a:ext uri="{FF2B5EF4-FFF2-40B4-BE49-F238E27FC236}">
-                <a16:creationId xmlns:a16="http://schemas.microsoft.com/office/drawing/2014/main" id="{568F28E0-482D-82A9-4946-B3B2052496B2}"/>
+                <a16:creationId xmlns:a16="http://schemas.microsoft.com/office/drawing/2014/main" id="{F3B015AE-AC11-9C7F-15FD-EBDCC2C60EE3}"/>
               </a:ext>
             </a:extLst>
           </p:cNvPr>
@@ -3754,7 +3754,7 @@
           <p:cNvPr id="5" name="テキスト ボックス 4">
             <a:extLst>
               <a:ext uri="{FF2B5EF4-FFF2-40B4-BE49-F238E27FC236}">
-                <a16:creationId xmlns:a16="http://schemas.microsoft.com/office/drawing/2014/main" id="{B69353B5-B55E-F040-BFEE-2BC15B8A54C6}"/>
+                <a16:creationId xmlns:a16="http://schemas.microsoft.com/office/drawing/2014/main" id="{051AF26F-5EB0-3961-EE89-824F6A049410}"/>
               </a:ext>
             </a:extLst>
           </p:cNvPr>
@@ -3801,7 +3801,7 @@
             <a:hlinkClick r:id="" action="ppaction://media"/>
             <a:extLst>
               <a:ext uri="{FF2B5EF4-FFF2-40B4-BE49-F238E27FC236}">
-                <a16:creationId xmlns:a16="http://schemas.microsoft.com/office/drawing/2014/main" id="{1425608C-A77F-1A12-C9DE-E6DE66BD1E84}"/>
+                <a16:creationId xmlns:a16="http://schemas.microsoft.com/office/drawing/2014/main" id="{546ADE15-E232-D9BB-747A-A6042DD9C1B0}"/>
               </a:ext>
             </a:extLst>
           </p:cNvPr>
@@ -3836,7 +3836,7 @@
     </p:spTree>
     <p:extLst>
       <p:ext uri="{BB962C8B-B14F-4D97-AF65-F5344CB8AC3E}">
-        <p14:creationId xmlns:p14="http://schemas.microsoft.com/office/powerpoint/2010/main" val="4106878757"/>
+        <p14:creationId xmlns:p14="http://schemas.microsoft.com/office/powerpoint/2010/main" val="1831824132"/>
       </p:ext>
     </p:extLst>
   </p:cSld>
@@ -3960,7 +3960,7 @@
           <p:cNvPr id="2" name="テキスト ボックス 1">
             <a:extLst>
               <a:ext uri="{FF2B5EF4-FFF2-40B4-BE49-F238E27FC236}">
-                <a16:creationId xmlns:a16="http://schemas.microsoft.com/office/drawing/2014/main" id="{716316CF-A88F-4A64-8314-71C114F29088}"/>
+                <a16:creationId xmlns:a16="http://schemas.microsoft.com/office/drawing/2014/main" id="{49EA0A33-EDAC-4275-6FE4-F4F7DCB100C8}"/>
               </a:ext>
             </a:extLst>
           </p:cNvPr>
@@ -4006,7 +4006,7 @@
           <p:cNvPr id="3" name="テキスト ボックス 2">
             <a:extLst>
               <a:ext uri="{FF2B5EF4-FFF2-40B4-BE49-F238E27FC236}">
-                <a16:creationId xmlns:a16="http://schemas.microsoft.com/office/drawing/2014/main" id="{FC1A20E9-2362-7E41-2183-E98C117F8364}"/>
+                <a16:creationId xmlns:a16="http://schemas.microsoft.com/office/drawing/2014/main" id="{4E8529B6-F0BA-B201-FD72-B2C54FA67ECC}"/>
               </a:ext>
             </a:extLst>
           </p:cNvPr>
@@ -4046,7 +4046,7 @@
           <p:cNvPr id="4" name="テキスト ボックス 3">
             <a:extLst>
               <a:ext uri="{FF2B5EF4-FFF2-40B4-BE49-F238E27FC236}">
-                <a16:creationId xmlns:a16="http://schemas.microsoft.com/office/drawing/2014/main" id="{8C7026B4-DBE0-E2BF-53F4-168CAC96F96B}"/>
+                <a16:creationId xmlns:a16="http://schemas.microsoft.com/office/drawing/2014/main" id="{16612460-E570-41E6-2F8F-500DF4F131EC}"/>
               </a:ext>
             </a:extLst>
           </p:cNvPr>
@@ -4110,7 +4110,7 @@
           <p:cNvPr id="5" name="テキスト ボックス 4">
             <a:extLst>
               <a:ext uri="{FF2B5EF4-FFF2-40B4-BE49-F238E27FC236}">
-                <a16:creationId xmlns:a16="http://schemas.microsoft.com/office/drawing/2014/main" id="{BAE05BE2-F01A-A76F-2F8F-5AA8A81F9165}"/>
+                <a16:creationId xmlns:a16="http://schemas.microsoft.com/office/drawing/2014/main" id="{10567902-F99F-0FA8-C1CD-DCFB685EC524}"/>
               </a:ext>
             </a:extLst>
           </p:cNvPr>
@@ -4157,7 +4157,7 @@
             <a:hlinkClick r:id="" action="ppaction://media"/>
             <a:extLst>
               <a:ext uri="{FF2B5EF4-FFF2-40B4-BE49-F238E27FC236}">
-                <a16:creationId xmlns:a16="http://schemas.microsoft.com/office/drawing/2014/main" id="{5A813A22-A8A1-281C-8B44-A378D2851C01}"/>
+                <a16:creationId xmlns:a16="http://schemas.microsoft.com/office/drawing/2014/main" id="{6F36CE53-C375-5778-906A-E304773DE710}"/>
               </a:ext>
             </a:extLst>
           </p:cNvPr>
@@ -4192,7 +4192,7 @@
     </p:spTree>
     <p:extLst>
       <p:ext uri="{BB962C8B-B14F-4D97-AF65-F5344CB8AC3E}">
-        <p14:creationId xmlns:p14="http://schemas.microsoft.com/office/powerpoint/2010/main" val="500912947"/>
+        <p14:creationId xmlns:p14="http://schemas.microsoft.com/office/powerpoint/2010/main" val="1031043508"/>
       </p:ext>
     </p:extLst>
   </p:cSld>
@@ -4316,7 +4316,7 @@
           <p:cNvPr id="2" name="テキスト ボックス 1">
             <a:extLst>
               <a:ext uri="{FF2B5EF4-FFF2-40B4-BE49-F238E27FC236}">
-                <a16:creationId xmlns:a16="http://schemas.microsoft.com/office/drawing/2014/main" id="{097BCFAD-B396-EDD9-A6CC-D906D83CE715}"/>
+                <a16:creationId xmlns:a16="http://schemas.microsoft.com/office/drawing/2014/main" id="{31437037-4607-0754-EE26-BD2E438CF7F1}"/>
               </a:ext>
             </a:extLst>
           </p:cNvPr>
@@ -4362,7 +4362,7 @@
           <p:cNvPr id="3" name="テキスト ボックス 2">
             <a:extLst>
               <a:ext uri="{FF2B5EF4-FFF2-40B4-BE49-F238E27FC236}">
-                <a16:creationId xmlns:a16="http://schemas.microsoft.com/office/drawing/2014/main" id="{3B466C13-E953-514C-7BAE-B8F4A7D2FC9E}"/>
+                <a16:creationId xmlns:a16="http://schemas.microsoft.com/office/drawing/2014/main" id="{12D952D2-A956-1211-E19D-4E873157D98F}"/>
               </a:ext>
             </a:extLst>
           </p:cNvPr>
@@ -4402,7 +4402,7 @@
           <p:cNvPr id="4" name="テキスト ボックス 3">
             <a:extLst>
               <a:ext uri="{FF2B5EF4-FFF2-40B4-BE49-F238E27FC236}">
-                <a16:creationId xmlns:a16="http://schemas.microsoft.com/office/drawing/2014/main" id="{BD668F2A-D310-2E68-0ABF-FA7914DBFC27}"/>
+                <a16:creationId xmlns:a16="http://schemas.microsoft.com/office/drawing/2014/main" id="{394431F2-1E0A-CE19-9F9D-BDB5CB35BD3E}"/>
               </a:ext>
             </a:extLst>
           </p:cNvPr>
@@ -4497,7 +4497,7 @@
           <p:cNvPr id="5" name="テキスト ボックス 4">
             <a:extLst>
               <a:ext uri="{FF2B5EF4-FFF2-40B4-BE49-F238E27FC236}">
-                <a16:creationId xmlns:a16="http://schemas.microsoft.com/office/drawing/2014/main" id="{90E47618-E5A6-6BBB-EA09-DFB2A80F79E7}"/>
+                <a16:creationId xmlns:a16="http://schemas.microsoft.com/office/drawing/2014/main" id="{7F57508F-05D3-D538-D726-A3D0DE2D115E}"/>
               </a:ext>
             </a:extLst>
           </p:cNvPr>
@@ -4544,7 +4544,7 @@
             <a:hlinkClick r:id="" action="ppaction://media"/>
             <a:extLst>
               <a:ext uri="{FF2B5EF4-FFF2-40B4-BE49-F238E27FC236}">
-                <a16:creationId xmlns:a16="http://schemas.microsoft.com/office/drawing/2014/main" id="{28B94D02-08F3-C827-3BC8-9A9567D9AA0F}"/>
+                <a16:creationId xmlns:a16="http://schemas.microsoft.com/office/drawing/2014/main" id="{71D8AFEC-A36E-551F-7FBF-8CC826234AC2}"/>
               </a:ext>
             </a:extLst>
           </p:cNvPr>
@@ -4579,7 +4579,7 @@
     </p:spTree>
     <p:extLst>
       <p:ext uri="{BB962C8B-B14F-4D97-AF65-F5344CB8AC3E}">
-        <p14:creationId xmlns:p14="http://schemas.microsoft.com/office/powerpoint/2010/main" val="685671049"/>
+        <p14:creationId xmlns:p14="http://schemas.microsoft.com/office/powerpoint/2010/main" val="644644729"/>
       </p:ext>
     </p:extLst>
   </p:cSld>
@@ -4703,7 +4703,7 @@
           <p:cNvPr id="2" name="テキスト ボックス 1">
             <a:extLst>
               <a:ext uri="{FF2B5EF4-FFF2-40B4-BE49-F238E27FC236}">
-                <a16:creationId xmlns:a16="http://schemas.microsoft.com/office/drawing/2014/main" id="{1AB279D8-931A-309E-4523-AD0513FBA5CC}"/>
+                <a16:creationId xmlns:a16="http://schemas.microsoft.com/office/drawing/2014/main" id="{9790611A-52AB-7756-DB56-30FE3131041B}"/>
               </a:ext>
             </a:extLst>
           </p:cNvPr>
@@ -4749,7 +4749,7 @@
           <p:cNvPr id="3" name="テキスト ボックス 2">
             <a:extLst>
               <a:ext uri="{FF2B5EF4-FFF2-40B4-BE49-F238E27FC236}">
-                <a16:creationId xmlns:a16="http://schemas.microsoft.com/office/drawing/2014/main" id="{BBD32F74-8DCD-4543-D740-EAC89619545D}"/>
+                <a16:creationId xmlns:a16="http://schemas.microsoft.com/office/drawing/2014/main" id="{B0B06208-7FC2-5530-D3B1-9E34AC144C1B}"/>
               </a:ext>
             </a:extLst>
           </p:cNvPr>
@@ -4789,7 +4789,7 @@
           <p:cNvPr id="4" name="テキスト ボックス 3">
             <a:extLst>
               <a:ext uri="{FF2B5EF4-FFF2-40B4-BE49-F238E27FC236}">
-                <a16:creationId xmlns:a16="http://schemas.microsoft.com/office/drawing/2014/main" id="{179B5875-2004-3CCB-D3BA-F715853F84CF}"/>
+                <a16:creationId xmlns:a16="http://schemas.microsoft.com/office/drawing/2014/main" id="{F1C7B47F-69AE-5653-99C2-BFAE5EFC0C97}"/>
               </a:ext>
             </a:extLst>
           </p:cNvPr>
@@ -4899,7 +4899,7 @@
           <p:cNvPr id="5" name="テキスト ボックス 4">
             <a:extLst>
               <a:ext uri="{FF2B5EF4-FFF2-40B4-BE49-F238E27FC236}">
-                <a16:creationId xmlns:a16="http://schemas.microsoft.com/office/drawing/2014/main" id="{953E0A26-AED9-2076-F45F-1F26BB440B7A}"/>
+                <a16:creationId xmlns:a16="http://schemas.microsoft.com/office/drawing/2014/main" id="{059FC4A5-A16A-4958-CC60-EE11023A641F}"/>
               </a:ext>
             </a:extLst>
           </p:cNvPr>
@@ -4946,7 +4946,7 @@
             <a:hlinkClick r:id="" action="ppaction://media"/>
             <a:extLst>
               <a:ext uri="{FF2B5EF4-FFF2-40B4-BE49-F238E27FC236}">
-                <a16:creationId xmlns:a16="http://schemas.microsoft.com/office/drawing/2014/main" id="{42D58E85-51A2-BD5D-0D63-CB2A54B124E1}"/>
+                <a16:creationId xmlns:a16="http://schemas.microsoft.com/office/drawing/2014/main" id="{EB97F874-DDF4-C6A2-6E3F-15F784BD5046}"/>
               </a:ext>
             </a:extLst>
           </p:cNvPr>
@@ -4981,7 +4981,7 @@
     </p:spTree>
     <p:extLst>
       <p:ext uri="{BB962C8B-B14F-4D97-AF65-F5344CB8AC3E}">
-        <p14:creationId xmlns:p14="http://schemas.microsoft.com/office/powerpoint/2010/main" val="779361773"/>
+        <p14:creationId xmlns:p14="http://schemas.microsoft.com/office/powerpoint/2010/main" val="198036302"/>
       </p:ext>
     </p:extLst>
   </p:cSld>
@@ -5105,7 +5105,7 @@
           <p:cNvPr id="2" name="テキスト ボックス 1">
             <a:extLst>
               <a:ext uri="{FF2B5EF4-FFF2-40B4-BE49-F238E27FC236}">
-                <a16:creationId xmlns:a16="http://schemas.microsoft.com/office/drawing/2014/main" id="{9BC0B0DB-D5AE-5A77-2E38-3EBC7622D492}"/>
+                <a16:creationId xmlns:a16="http://schemas.microsoft.com/office/drawing/2014/main" id="{DFA935C7-4B5E-F995-560B-EF8505BF5DF6}"/>
               </a:ext>
             </a:extLst>
           </p:cNvPr>
@@ -5151,7 +5151,7 @@
           <p:cNvPr id="3" name="テキスト ボックス 2">
             <a:extLst>
               <a:ext uri="{FF2B5EF4-FFF2-40B4-BE49-F238E27FC236}">
-                <a16:creationId xmlns:a16="http://schemas.microsoft.com/office/drawing/2014/main" id="{0E7EB00D-3A15-A6B7-F65B-1990C84A3AA7}"/>
+                <a16:creationId xmlns:a16="http://schemas.microsoft.com/office/drawing/2014/main" id="{4917C44E-195A-A784-1C0A-0FEEF3CC8026}"/>
               </a:ext>
             </a:extLst>
           </p:cNvPr>
@@ -5191,7 +5191,7 @@
           <p:cNvPr id="4" name="テキスト ボックス 3">
             <a:extLst>
               <a:ext uri="{FF2B5EF4-FFF2-40B4-BE49-F238E27FC236}">
-                <a16:creationId xmlns:a16="http://schemas.microsoft.com/office/drawing/2014/main" id="{22F8AA39-1F96-4764-D259-F58EDBD4F55F}"/>
+                <a16:creationId xmlns:a16="http://schemas.microsoft.com/office/drawing/2014/main" id="{3BC772D8-8E11-07A9-2F70-C0D491C98F37}"/>
               </a:ext>
             </a:extLst>
           </p:cNvPr>
@@ -5215,20 +5215,14 @@
           <a:lstStyle/>
           <a:p>
             <a:r>
-              <a:rPr kumimoji="1" lang="en-US" altLang="ja-JP" sz="2000">
+              <a:rPr kumimoji="1" lang="ja-JP" altLang="en-US" sz="2000">
                 <a:solidFill>
                   <a:srgbClr val="333333"/>
                 </a:solidFill>
                 <a:latin typeface="Arial" panose="020B0604020202020204" pitchFamily="34" charset="0"/>
               </a:rPr>
-              <a:t>Set confirmed custom domain</a:t>
-            </a:r>
-            <a:endParaRPr kumimoji="1" lang="ja-JP" altLang="en-US" sz="2000">
-              <a:solidFill>
-                <a:srgbClr val="333333"/>
-              </a:solidFill>
-              <a:latin typeface="Arial" panose="020B0604020202020204" pitchFamily="34" charset="0"/>
-            </a:endParaRPr>
+              <a:t>直近のコミットでは、実装の見直しと継続的な改善が行われました。</a:t>
+            </a:r>
           </a:p>
         </p:txBody>
       </p:sp>
@@ -5237,7 +5231,7 @@
           <p:cNvPr id="5" name="テキスト ボックス 4">
             <a:extLst>
               <a:ext uri="{FF2B5EF4-FFF2-40B4-BE49-F238E27FC236}">
-                <a16:creationId xmlns:a16="http://schemas.microsoft.com/office/drawing/2014/main" id="{2D72509D-81FB-D218-1338-43C2D80727E5}"/>
+                <a16:creationId xmlns:a16="http://schemas.microsoft.com/office/drawing/2014/main" id="{160EFCD0-F3E3-042F-B231-D2E768955C48}"/>
               </a:ext>
             </a:extLst>
           </p:cNvPr>
@@ -5284,7 +5278,7 @@
             <a:hlinkClick r:id="" action="ppaction://media"/>
             <a:extLst>
               <a:ext uri="{FF2B5EF4-FFF2-40B4-BE49-F238E27FC236}">
-                <a16:creationId xmlns:a16="http://schemas.microsoft.com/office/drawing/2014/main" id="{EA95B114-DF21-BCAC-9FE9-031F814AC93C}"/>
+                <a16:creationId xmlns:a16="http://schemas.microsoft.com/office/drawing/2014/main" id="{0742399C-E578-9BB3-C458-67D5082FADC3}"/>
               </a:ext>
             </a:extLst>
           </p:cNvPr>
@@ -5319,7 +5313,7 @@
     </p:spTree>
     <p:extLst>
       <p:ext uri="{BB962C8B-B14F-4D97-AF65-F5344CB8AC3E}">
-        <p14:creationId xmlns:p14="http://schemas.microsoft.com/office/powerpoint/2010/main" val="2304210234"/>
+        <p14:creationId xmlns:p14="http://schemas.microsoft.com/office/powerpoint/2010/main" val="3484668425"/>
       </p:ext>
     </p:extLst>
   </p:cSld>
@@ -5362,7 +5356,7 @@
                                   <p:childTnLst>
                                     <p:cmd type="call" cmd="playFrom(0.0)">
                                       <p:cBhvr>
-                                        <p:cTn id="6" dur="6451" fill="hold"/>
+                                        <p:cTn id="6" dur="6076" fill="hold"/>
                                         <p:tgtEl>
                                           <p:spTgt spid="6"/>
                                         </p:tgtEl>
@@ -5443,7 +5437,7 @@
           <p:cNvPr id="2" name="テキスト ボックス 1">
             <a:extLst>
               <a:ext uri="{FF2B5EF4-FFF2-40B4-BE49-F238E27FC236}">
-                <a16:creationId xmlns:a16="http://schemas.microsoft.com/office/drawing/2014/main" id="{E1EA1E1E-6D6B-B478-41B3-A766A31078AB}"/>
+                <a16:creationId xmlns:a16="http://schemas.microsoft.com/office/drawing/2014/main" id="{1960E21E-67CA-0968-694A-91E30BBC3BD7}"/>
               </a:ext>
             </a:extLst>
           </p:cNvPr>
@@ -5489,7 +5483,7 @@
           <p:cNvPr id="3" name="テキスト ボックス 2">
             <a:extLst>
               <a:ext uri="{FF2B5EF4-FFF2-40B4-BE49-F238E27FC236}">
-                <a16:creationId xmlns:a16="http://schemas.microsoft.com/office/drawing/2014/main" id="{2D806FA8-0383-88B5-D898-F008B165B95F}"/>
+                <a16:creationId xmlns:a16="http://schemas.microsoft.com/office/drawing/2014/main" id="{4DB62BF2-C178-6454-EA23-46384AE33FF8}"/>
               </a:ext>
             </a:extLst>
           </p:cNvPr>
@@ -5529,7 +5523,7 @@
           <p:cNvPr id="4" name="テキスト ボックス 3">
             <a:extLst>
               <a:ext uri="{FF2B5EF4-FFF2-40B4-BE49-F238E27FC236}">
-                <a16:creationId xmlns:a16="http://schemas.microsoft.com/office/drawing/2014/main" id="{FF1FD2E1-9582-B052-19AB-49629E80A955}"/>
+                <a16:creationId xmlns:a16="http://schemas.microsoft.com/office/drawing/2014/main" id="{A0FCE84C-4377-85DB-9B11-03B09CF5AA16}"/>
               </a:ext>
             </a:extLst>
           </p:cNvPr>
@@ -5594,7 +5588,7 @@
           <p:cNvPr id="5" name="テキスト ボックス 4">
             <a:extLst>
               <a:ext uri="{FF2B5EF4-FFF2-40B4-BE49-F238E27FC236}">
-                <a16:creationId xmlns:a16="http://schemas.microsoft.com/office/drawing/2014/main" id="{EF81236E-2FBD-0D22-E86B-14C4A758F8AC}"/>
+                <a16:creationId xmlns:a16="http://schemas.microsoft.com/office/drawing/2014/main" id="{C5343886-780F-A474-DDBE-99EF717E59B3}"/>
               </a:ext>
             </a:extLst>
           </p:cNvPr>
@@ -5641,7 +5635,7 @@
             <a:hlinkClick r:id="" action="ppaction://media"/>
             <a:extLst>
               <a:ext uri="{FF2B5EF4-FFF2-40B4-BE49-F238E27FC236}">
-                <a16:creationId xmlns:a16="http://schemas.microsoft.com/office/drawing/2014/main" id="{136323B5-B7F9-70E5-B83D-09BCBE5FCEEB}"/>
+                <a16:creationId xmlns:a16="http://schemas.microsoft.com/office/drawing/2014/main" id="{DCCD6C6E-F53E-2C26-C89D-B2887BE943AA}"/>
               </a:ext>
             </a:extLst>
           </p:cNvPr>
@@ -5676,7 +5670,7 @@
     </p:spTree>
     <p:extLst>
       <p:ext uri="{BB962C8B-B14F-4D97-AF65-F5344CB8AC3E}">
-        <p14:creationId xmlns:p14="http://schemas.microsoft.com/office/powerpoint/2010/main" val="2786744025"/>
+        <p14:creationId xmlns:p14="http://schemas.microsoft.com/office/powerpoint/2010/main" val="1715259026"/>
       </p:ext>
     </p:extLst>
   </p:cSld>
